--- a/week-06/presentations/ppts/day-04-ai-stakeholder-summaries.pptx
+++ b/week-06/presentations/ppts/day-04-ai-stakeholder-summaries.pptx
@@ -1447,7 +1447,7 @@
             </a:pPr>
             <a:r>
               <a:rPr/>
-              <a:t>SEP §4 ships today; tomorrow is the live simulation.</a:t>
+              <a:t>SEP Section 4 ships today; tomorrow is the live simulation.</a:t>
             </a:r>
           </a:p>
         </p:txBody>
@@ -2021,7 +2021,7 @@
             </a:pPr>
             <a:r>
               <a:rPr/>
-              <a:t>Push validation. “Looks fine” without opening §3 is not validation.</a:t>
+              <a:t>Push validation. “Looks fine” without opening Section 3 is not validation.</a:t>
             </a:r>
           </a:p>
         </p:txBody>
@@ -5329,7 +5329,7 @@
             </a:pPr>
             <a:r>
               <a:rPr/>
-              <a:t>🧿 Objection-Map Prompt</a:t>
+              <a:t>🤖 Objection-Map Prompt</a:t>
             </a:r>
           </a:p>
         </p:txBody>
@@ -6052,7 +6052,7 @@
             </a:pPr>
             <a:r>
               <a:rPr/>
-              <a:t>Each triad updates §4 with: opening tweak, harder-than-expected objection, “I wish I’d said”</a:t>
+              <a:t>Each triad updates Section 4 with: opening tweak, harder-than-expected objection, “I wish I’d said”</a:t>
             </a:r>
           </a:p>
         </p:txBody>
@@ -6099,7 +6099,7 @@
             </a:pPr>
             <a:r>
               <a:rPr/>
-              <a:t>🧿 AI Cross-Check on the Whole Packet</a:t>
+              <a:t>🤖 AI Cross-Check on the Whole Packet</a:t>
             </a:r>
           </a:p>
         </p:txBody>
@@ -6303,7 +6303,7 @@
             </a:pPr>
             <a:r>
               <a:rPr/>
-              <a:t>10 min: AI cross-check + update §4</a:t>
+              <a:t>10 min: AI cross-check + update Section 4</a:t>
             </a:r>
           </a:p>
           <a:p>
@@ -6438,7 +6438,7 @@
             </a:pPr>
             <a:r>
               <a:rPr/>
-              <a:t>SEP §4 drafted</a:t>
+              <a:t>SEP Section 4 drafted</a:t>
             </a:r>
           </a:p>
           <a:p>
@@ -6501,7 +6501,7 @@
             </a:pPr>
             <a:r>
               <a:rPr/>
-              <a:t>Bring to Day 5: SEP §§1–4 + the mock-meeting captures. Tomorrow you negotiate live.</a:t>
+              <a:t>Bring to Day 5: SEP Sections 1–4 + the mock-meeting captures. Tomorrow you negotiate live.</a:t>
             </a:r>
           </a:p>
         </p:txBody>
@@ -7193,7 +7193,7 @@
             </a:pPr>
             <a:r>
               <a:rPr/>
-              <a:t>🧿 Two-Prompt Pattern</a:t>
+              <a:t>🤖 Two-Prompt Pattern</a:t>
             </a:r>
           </a:p>
         </p:txBody>

--- a/week-06/presentations/ppts/day-04-ai-stakeholder-summaries.pptx
+++ b/week-06/presentations/ppts/day-04-ai-stakeholder-summaries.pptx
@@ -6465,7 +6465,7 @@
             </a:pPr>
             <a:r>
               <a:rPr/>
-              <a:t>Architecture / SLO round</a:t>
+              <a:t>Architecture / Service Level Objective (SLO) round</a:t>
             </a:r>
           </a:p>
           <a:p>
@@ -7227,7 +7227,7 @@
             </a:pPr>
             <a:r>
               <a:rPr/>
-              <a:t>Pull from PRD/TCD/TMD/SEP excerpts. Output: prior decisions / open questions / past tension, with citations.</a:t>
+              <a:t>Pull excerpts from the four prior artifacts — Product Requirements Document (PRD), Technical Concept Document (TCD), Technical Modeling Document (TMD), and Stakeholder Engagement Plan (SEP).</a:t>
             </a:r>
           </a:p>
           <a:p>

--- a/week-06/presentations/ppts/day-04-ai-stakeholder-summaries.pptx
+++ b/week-06/presentations/ppts/day-04-ai-stakeholder-summaries.pptx
@@ -5277,6 +5277,23 @@
           <a:bodyPr/>
           <a:lstStyle/>
           <a:p>
+            <a:pPr lvl="0" indent="0">
+              <a:buNone/>
+            </a:pPr>
+            <a:r>
+              <a:rPr>
+                <a:latin typeface="Courier"/>
+              </a:rPr>
+              <a:t>### Objection N: &lt;short name&gt;
+**The stakeholder says:** &lt;quoted, in their voice&gt;
+**The honest response:** &lt;what's actually true; do not over-promise&gt;
+**The pivot (if pushback continues):** &lt;where to redirect — usually
+to a deeper "why" or to a documented trade-off&gt;
+**The line we hold:** &lt;if this objection wins, what's the smallest
+ground we give up?&gt;</a:t>
+            </a:r>
+          </a:p>
+          <a:p>
             <a:pPr lvl="0" indent="0" marL="0">
               <a:buNone/>
             </a:pPr>
@@ -5334,6 +5351,41 @@
           </a:p>
         </p:txBody>
       </p:sp>
+      <p:sp>
+        <p:nvSpPr>
+          <p:cNvPr id="3" name="Content Placeholder 2"/>
+          <p:cNvSpPr>
+            <a:spLocks noGrp="1"/>
+          </p:cNvSpPr>
+          <p:nvPr>
+            <p:ph idx="1"/>
+          </p:nvPr>
+        </p:nvSpPr>
+        <p:spPr/>
+        <p:txBody>
+          <a:bodyPr/>
+          <a:lstStyle/>
+          <a:p>
+            <a:pPr lvl="0" indent="0">
+              <a:buNone/>
+            </a:pPr>
+            <a:r>
+              <a:rPr>
+                <a:latin typeface="Courier"/>
+              </a:rPr>
+              <a:t>Role: &lt;stakeholder type — e.g., Compliance Lead, Architect&gt;
+Context: &lt;Day 3 brief + relevant TCD/TMD excerpts&gt;
+Task: Read as the named stakeholder. List your top 5 objections,
+ranked by intensity.
+Constraints:
+- Specific to the brief, not generic
+- Voice the stakeholder honestly — not a strawman
+- At least 1 objection should be hostile (the one you'd push hardest)
+Format: 5 numbered objections in the stakeholder's likely tone.</a:t>
+            </a:r>
+          </a:p>
+        </p:txBody>
+      </p:sp>
     </p:spTree>
   </p:cSld>
 </p:sld>
@@ -6104,6 +6156,43 @@
           </a:p>
         </p:txBody>
       </p:sp>
+      <p:sp>
+        <p:nvSpPr>
+          <p:cNvPr id="3" name="Content Placeholder 2"/>
+          <p:cNvSpPr>
+            <a:spLocks noGrp="1"/>
+          </p:cNvSpPr>
+          <p:nvPr>
+            <p:ph idx="1"/>
+          </p:nvPr>
+        </p:nvSpPr>
+        <p:spPr/>
+        <p:txBody>
+          <a:bodyPr/>
+          <a:lstStyle/>
+          <a:p>
+            <a:pPr lvl="0" indent="0">
+              <a:buNone/>
+            </a:pPr>
+            <a:r>
+              <a:rPr>
+                <a:latin typeface="Courier"/>
+              </a:rPr>
+              <a:t>Role: Negotiation coach reviewing a meeting-prep packet.
+Context: &lt;paste the Section 4 packet — opening, objection map,
+non-negotiables&gt;
+Task: Identify 3 gaps in the prep:
+1. An objection probably under-prepared
+2. A non-negotiable that's actually negotiable (or absent)
+3. A part of the opening likely to sound rehearsed in a bad way
+Constraints:
+- Be specific
+- Suggest a concrete fix
+Format: 3 numbered findings.</a:t>
+            </a:r>
+          </a:p>
+        </p:txBody>
+      </p:sp>
     </p:spTree>
   </p:cSld>
 </p:sld>
@@ -7246,6 +7335,23 @@
             <a:r>
               <a:rPr/>
               <a:t>What’s likely to come up that the documented context does NOT cover? 3 gaps + suggested research.</a:t>
+            </a:r>
+          </a:p>
+          <a:p>
+            <a:pPr lvl="0" indent="0">
+              <a:buNone/>
+            </a:pPr>
+            <a:r>
+              <a:rPr>
+                <a:latin typeface="Courier"/>
+              </a:rPr>
+              <a:t>A. Role: Project archivist for a TPM.
+Context: &lt;relevant PRD/TCD/TMD/SEP excerpts&gt;
+Task: Prior-context summary —
+1. Prior decisions made (with section reference)
+2. Open questions remaining
+3. Tension surfaced (if any) with reference
+Constraints: only provided content; cite sections; "none documented" if N/A.</a:t>
             </a:r>
           </a:p>
         </p:txBody>

--- a/week-06/presentations/ppts/day-04-ai-stakeholder-summaries.pptx
+++ b/week-06/presentations/ppts/day-04-ai-stakeholder-summaries.pptx
@@ -873,7 +873,7 @@
             </a:pPr>
             <a:r>
               <a:rPr/>
-              <a:t>The opening is the most-rehearsed part. Triads who skip rehearsal sound rehearsed in a bad way tomorrow.</a:t>
+              <a:t>The opening is the most-rehearsed part. Quads who skip rehearsal sound rehearsed in a bad way tomorrow.</a:t>
             </a:r>
           </a:p>
         </p:txBody>
@@ -1939,7 +1939,7 @@
             </a:pPr>
             <a:r>
               <a:rPr/>
-              <a:t>Validation step is mandatory. Don’t let triads skip it.</a:t>
+              <a:t>Validation step is mandatory. Don’t let quads skip it.</a:t>
             </a:r>
           </a:p>
         </p:txBody>
@@ -5456,7 +5456,7 @@
             </a:pPr>
             <a:r>
               <a:rPr b="1"/>
-              <a:t>Triads • 40 minutes</a:t>
+              <a:t>Quads • 40 minutes</a:t>
             </a:r>
           </a:p>
           <a:p>
@@ -5867,7 +5867,7 @@
             </a:pPr>
             <a:r>
               <a:rPr b="1"/>
-              <a:t>Triads • 40 minutes</a:t>
+              <a:t>Quads • 40 minutes</a:t>
             </a:r>
           </a:p>
           <a:p>
@@ -6059,16 +6059,16 @@
             </a:pPr>
             <a:r>
               <a:rPr/>
-              <a:t>Pair triads (same as Day 3)</a:t>
-            </a:r>
-          </a:p>
-          <a:p>
-            <a:pPr lvl="0" indent="0" marL="0">
-              <a:buNone/>
-            </a:pPr>
-            <a:r>
-              <a:rPr/>
-              <a:t>Triad A opens (5 min) — gives opening; reviewer raises 1–2 objections in role</a:t>
+              <a:t>Pair quads (same as Day 3)</a:t>
+            </a:r>
+          </a:p>
+          <a:p>
+            <a:pPr lvl="0" indent="0" marL="0">
+              <a:buNone/>
+            </a:pPr>
+            <a:r>
+              <a:rPr/>
+              <a:t>Quad A opens (5 min) — gives opening; reviewer raises 1–2 objections in role</a:t>
             </a:r>
           </a:p>
           <a:p>
@@ -6104,7 +6104,7 @@
             </a:pPr>
             <a:r>
               <a:rPr/>
-              <a:t>Each triad updates Section 4 with: opening tweak, harder-than-expected objection, “I wish I’d said”</a:t>
+              <a:t>Each quad updates Section 4 with: opening tweak, harder-than-expected objection, “I wish I’d said”</a:t>
             </a:r>
           </a:p>
         </p:txBody>
@@ -6338,7 +6338,7 @@
             </a:pPr>
             <a:r>
               <a:rPr b="1"/>
-              <a:t>Triad pairs • 45 minutes • Wrap</a:t>
+              <a:t>Quad pairs • 45 minutes • Wrap</a:t>
             </a:r>
           </a:p>
           <a:p>
@@ -6773,7 +6773,7 @@
             </a:pPr>
             <a:r>
               <a:rPr/>
-              <a:t>Run a mock meeting with another triad in role</a:t>
+              <a:t>Run a mock meeting with another quad in role</a:t>
             </a:r>
           </a:p>
         </p:txBody>
@@ -7426,7 +7426,7 @@
             </a:pPr>
             <a:r>
               <a:rPr b="1"/>
-              <a:t>Triads • 35 minutes</a:t>
+              <a:t>Quads • 35 minutes</a:t>
             </a:r>
           </a:p>
           <a:p>

--- a/week-06/presentations/ppts/day-04-ai-stakeholder-summaries.pptx
+++ b/week-06/presentations/ppts/day-04-ai-stakeholder-summaries.pptx
@@ -5456,7 +5456,7 @@
             </a:pPr>
             <a:r>
               <a:rPr b="1"/>
-              <a:t>Quads • 40 minutes</a:t>
+              <a:t>Quads • 50 minutes</a:t>
             </a:r>
           </a:p>
           <a:p>
@@ -5867,7 +5867,7 @@
             </a:pPr>
             <a:r>
               <a:rPr b="1"/>
-              <a:t>Quads • 40 minutes</a:t>
+              <a:t>Quads • 50 minutes</a:t>
             </a:r>
           </a:p>
           <a:p>
@@ -6338,7 +6338,7 @@
             </a:pPr>
             <a:r>
               <a:rPr b="1"/>
-              <a:t>Quad pairs • 45 minutes • Wrap</a:t>
+              <a:t>Quad pairs • 55 minutes • Wrap</a:t>
             </a:r>
           </a:p>
           <a:p>
@@ -7426,7 +7426,7 @@
             </a:pPr>
             <a:r>
               <a:rPr b="1"/>
-              <a:t>Quads • 35 minutes</a:t>
+              <a:t>Quads • 45 minutes</a:t>
             </a:r>
           </a:p>
           <a:p>

--- a/week-06/presentations/ppts/day-04-ai-stakeholder-summaries.pptx
+++ b/week-06/presentations/ppts/day-04-ai-stakeholder-summaries.pptx
@@ -5483,7 +5483,7 @@
             </a:pPr>
             <a:r>
               <a:rPr/>
-              <a:t>15 min: write response/pivot/line per objection</a:t>
+              <a:t>25 min: write response/pivot/line per objection</a:t>
             </a:r>
           </a:p>
           <a:p>
@@ -5501,7 +5501,7 @@
             </a:pPr>
             <a:r>
               <a:rPr/>
-              <a:t>⏱ 10 + 10 + 15 + 5</a:t>
+              <a:t>⏱ 10 + 10 + 25 + 5</a:t>
             </a:r>
           </a:p>
         </p:txBody>
@@ -5876,7 +5876,7 @@
             </a:pPr>
             <a:r>
               <a:rPr/>
-              <a:t>15 min: draft 4-part opening</a:t>
+              <a:t>25 min: draft 4-part opening</a:t>
             </a:r>
           </a:p>
           <a:p>
@@ -5912,7 +5912,7 @@
             </a:pPr>
             <a:r>
               <a:rPr/>
-              <a:t>⏱ 15 + 10 + 10 + 5</a:t>
+              <a:t>⏱ 25 + 10 + 10 + 5</a:t>
             </a:r>
           </a:p>
         </p:txBody>
@@ -6356,7 +6356,7 @@
             </a:pPr>
             <a:r>
               <a:rPr/>
-              <a:t>10 min: round 1 (opening + objections)</a:t>
+              <a:t>20 min: round 1 (opening + objections)</a:t>
             </a:r>
           </a:p>
           <a:p>
@@ -6401,7 +6401,7 @@
             </a:pPr>
             <a:r>
               <a:rPr/>
-              <a:t>⏱ 5 + 10 + 5 + 10 + 5 + 10 · 15-min wrap</a:t>
+              <a:t>⏱ 5 + 20 + 5 + 10 + 5 + 10 · 15-min wrap</a:t>
             </a:r>
           </a:p>
         </p:txBody>
@@ -7453,7 +7453,7 @@
             </a:pPr>
             <a:r>
               <a:rPr/>
-              <a:t>15 min: validate citations (cross-check or spot-check)</a:t>
+              <a:t>25 min: validate citations (cross-check or spot-check)</a:t>
             </a:r>
           </a:p>
           <a:p>
@@ -7471,7 +7471,7 @@
             </a:pPr>
             <a:r>
               <a:rPr/>
-              <a:t>⏱ 5 + 10 + 15 + 5</a:t>
+              <a:t>⏱ 5 + 10 + 25 + 5</a:t>
             </a:r>
           </a:p>
         </p:txBody>
